--- a/cursos/recursos/aperturas-y-defensas/12-gambito-evans.pptx
+++ b/cursos/recursos/aperturas-y-defensas/12-gambito-evans.pptx
@@ -1602,7 +1602,7 @@
                 <a:ea typeface="Calibri" pitchFamily="34" charset="-122"/>
                 <a:cs typeface="Calibri" pitchFamily="34" charset="-120"/>
               </a:rPr>
-              <a:t>1.e4 e5 2.Nf3 Nc6 3.Bc4 Bc5 4.b4 ofrece un peón para ganar un tiempo de desarrollo (4...Bxb4 5.c3 Ba5 6.d4) y lanzar un ataque rápido contra el rey negro antes de que pueda consolidarse.</a:t>
+              <a:t>1.e4 e5 2.Cf3 Cc6 3.Ac4 Ac5 4.b4 ofrece un peón para ganar un tiempo de desarrollo (4...Axb4 5.c3 Aa5 6.d4) y lanzar un ataque rápido contra el rey negro antes de que pueda consolidarse.</a:t>
             </a:r>
             <a:endParaRPr lang="en-US" sz="1600" dirty="0"/>
           </a:p>
